--- a/public/fun/cards/creative/creative-19.pptx
+++ b/public/fun/cards/creative/creative-19.pptx
@@ -3099,20 +3099,20 @@
       <p:grpSpPr/>
       <p:sp>
         <p:nvSpPr>
-          <p:cNvPr id="2" name="Rectangle 1"/>
+          <p:cNvPr id="2" name="Oval 1"/>
           <p:cNvSpPr/>
           <p:nvPr/>
         </p:nvSpPr>
         <p:spPr>
           <a:xfrm>
-            <a:off x="2196000" y="0"/>
-            <a:ext cx="1044000" cy="1800000"/>
+            <a:off x="547200" y="475200"/>
+            <a:ext cx="849600" cy="849600"/>
           </a:xfrm>
-          <a:prstGeom prst="rect">
+          <a:prstGeom prst="ellipse">
             <a:avLst/>
           </a:prstGeom>
           <a:solidFill>
-            <a:srgbClr val="6991BF"/>
+            <a:srgbClr val="F5DEE4"/>
           </a:solidFill>
           <a:ln>
             <a:noFill/>
@@ -3134,14 +3134,16 @@
         </p:nvSpPr>
         <p:spPr>
           <a:xfrm>
-            <a:off x="2581920" y="513360"/>
-            <a:ext cx="272160" cy="272160"/>
+            <a:off x="187200" y="475200"/>
+            <a:ext cx="849600" cy="849600"/>
           </a:xfrm>
           <a:prstGeom prst="ellipse">
             <a:avLst/>
           </a:prstGeom>
           <a:solidFill>
-            <a:srgbClr val="FFFFFF"/>
+            <a:srgbClr val="B5123E">
+              <a:alpha val="92000"/>
+            </a:srgbClr>
           </a:solidFill>
           <a:ln>
             <a:noFill/>
@@ -3157,76 +3159,14 @@
       </p:sp>
       <p:sp>
         <p:nvSpPr>
-          <p:cNvPr id="4" name="Rounded Rectangle 3"/>
-          <p:cNvSpPr/>
+          <p:cNvPr id="4" name="텍스트"/>
+          <p:cNvSpPr txBox="1"/>
           <p:nvPr/>
         </p:nvSpPr>
         <p:spPr>
           <a:xfrm>
-            <a:off x="2652480" y="780480"/>
-            <a:ext cx="131040" cy="80640"/>
-          </a:xfrm>
-          <a:prstGeom prst="roundRect">
-            <a:avLst>
-              <a:gd name="adj" fmla="val 18749"/>
-            </a:avLst>
-          </a:prstGeom>
-          <a:solidFill>
-            <a:srgbClr val="737373"/>
-          </a:solidFill>
-          <a:ln>
-            <a:noFill/>
-          </a:ln>
-        </p:spPr>
-        <p:txBody>
-          <a:bodyPr rtlCol="0" anchor="ctr"/>
-          <a:lstStyle/>
-          <a:p>
-            <a:pPr algn="ctr"/>
-          </a:p>
-        </p:txBody>
-      </p:sp>
-      <p:sp>
-        <p:nvSpPr>
-          <p:cNvPr id="5" name="Rounded Rectangle 4"/>
-          <p:cNvSpPr/>
-          <p:nvPr/>
-        </p:nvSpPr>
-        <p:spPr>
-          <a:xfrm>
-            <a:off x="2672640" y="876240"/>
-            <a:ext cx="90720" cy="45360"/>
-          </a:xfrm>
-          <a:prstGeom prst="roundRect">
-            <a:avLst>
-              <a:gd name="adj" fmla="val 33333"/>
-            </a:avLst>
-          </a:prstGeom>
-          <a:solidFill>
-            <a:srgbClr val="737373"/>
-          </a:solidFill>
-          <a:ln>
-            <a:noFill/>
-          </a:ln>
-        </p:spPr>
-        <p:txBody>
-          <a:bodyPr rtlCol="0" anchor="ctr"/>
-          <a:lstStyle/>
-          <a:p>
-            <a:pPr algn="ctr"/>
-          </a:p>
-        </p:txBody>
-      </p:sp>
-      <p:sp>
-        <p:nvSpPr>
-          <p:cNvPr id="6" name="텍스트"/>
-          <p:cNvSpPr txBox="1"/>
-          <p:nvPr/>
-        </p:nvSpPr>
-        <p:spPr>
-          <a:xfrm>
-            <a:off x="2268000" y="1224000"/>
-            <a:ext cx="900000" cy="216000"/>
+            <a:off x="1692000" y="223200"/>
+            <a:ext cx="1296000" cy="133351"/>
           </a:xfrm>
           <a:prstGeom prst="rect">
             <a:avLst/>
@@ -3239,15 +3179,15 @@
           </a:bodyPr>
           <a:lstStyle/>
           <a:p>
-            <a:pPr algn="ctr">
+            <a:pPr algn="l">
               <a:lnSpc>
-                <a:spcPts val="1160"/>
+                <a:spcPts val="1015"/>
               </a:lnSpc>
             </a:pPr>
             <a:r>
-              <a:rPr sz="800" b="1" spc="150">
+              <a:rPr sz="700" b="1" spc="200">
                 <a:solidFill>
-                  <a:srgbClr val="FFFFFF"/>
+                  <a:srgbClr val="6B7280"/>
                 </a:solidFill>
                 <a:latin typeface="맑은 고딕"/>
                 <a:ea typeface="맑은 고딕"/>
@@ -3259,14 +3199,14 @@
       </p:sp>
       <p:sp>
         <p:nvSpPr>
-          <p:cNvPr id="7" name="텍스트"/>
+          <p:cNvPr id="5" name="텍스트"/>
           <p:cNvSpPr txBox="1"/>
           <p:nvPr/>
         </p:nvSpPr>
         <p:spPr>
           <a:xfrm>
-            <a:off x="216000" y="331200"/>
-            <a:ext cx="1872000" cy="313692"/>
+            <a:off x="1692000" y="540000"/>
+            <a:ext cx="1368000" cy="360000"/>
           </a:xfrm>
           <a:prstGeom prst="rect">
             <a:avLst/>
@@ -3281,13 +3221,13 @@
           <a:p>
             <a:pPr algn="l">
               <a:lnSpc>
-                <a:spcPts val="2755"/>
+                <a:spcPts val="3190"/>
               </a:lnSpc>
             </a:pPr>
             <a:r>
-              <a:rPr sz="1900" b="1" spc="50">
+              <a:rPr sz="2200" b="1">
                 <a:solidFill>
-                  <a:srgbClr val="3A5E88"/>
+                  <a:srgbClr val="12151C"/>
                 </a:solidFill>
                 <a:latin typeface="맑은 고딕"/>
                 <a:ea typeface="맑은 고딕"/>
@@ -3299,14 +3239,14 @@
       </p:sp>
       <p:sp>
         <p:nvSpPr>
-          <p:cNvPr id="8" name="텍스트"/>
+          <p:cNvPr id="6" name="텍스트"/>
           <p:cNvSpPr txBox="1"/>
           <p:nvPr/>
         </p:nvSpPr>
         <p:spPr>
           <a:xfrm>
-            <a:off x="216000" y="619200"/>
-            <a:ext cx="1872000" cy="122400"/>
+            <a:off x="1692000" y="943200"/>
+            <a:ext cx="1368000" cy="171451"/>
           </a:xfrm>
           <a:prstGeom prst="rect">
             <a:avLst/>
@@ -3321,13 +3261,13 @@
           <a:p>
             <a:pPr algn="l">
               <a:lnSpc>
-                <a:spcPts val="1232"/>
+                <a:spcPts val="1305"/>
               </a:lnSpc>
             </a:pPr>
             <a:r>
-              <a:rPr sz="850" b="1">
+              <a:rPr sz="900" b="0">
                 <a:solidFill>
-                  <a:srgbClr val="547499"/>
+                  <a:srgbClr val="6B7280"/>
                 </a:solidFill>
                 <a:latin typeface="맑은 고딕"/>
                 <a:ea typeface="맑은 고딕"/>
@@ -3339,20 +3279,20 @@
       </p:sp>
       <p:sp>
         <p:nvSpPr>
-          <p:cNvPr id="9" name="Rectangle 8"/>
+          <p:cNvPr id="7" name="Rectangle 6"/>
           <p:cNvSpPr/>
           <p:nvPr/>
         </p:nvSpPr>
         <p:spPr>
           <a:xfrm>
-            <a:off x="216000" y="828000"/>
-            <a:ext cx="201600" cy="14400"/>
+            <a:off x="1692000" y="1195200"/>
+            <a:ext cx="144000" cy="18000"/>
           </a:xfrm>
           <a:prstGeom prst="rect">
             <a:avLst/>
           </a:prstGeom>
           <a:solidFill>
-            <a:srgbClr val="6991BF"/>
+            <a:srgbClr val="B5123E"/>
           </a:solidFill>
           <a:ln>
             <a:noFill/>
@@ -3368,14 +3308,14 @@
       </p:sp>
       <p:sp>
         <p:nvSpPr>
-          <p:cNvPr id="10" name="텍스트"/>
+          <p:cNvPr id="8" name="텍스트"/>
           <p:cNvSpPr txBox="1"/>
           <p:nvPr/>
         </p:nvSpPr>
         <p:spPr>
           <a:xfrm>
-            <a:off x="216000" y="1008000"/>
-            <a:ext cx="122400" cy="168911"/>
+            <a:off x="1692000" y="1328400"/>
+            <a:ext cx="331200" cy="99061"/>
           </a:xfrm>
           <a:prstGeom prst="rect">
             <a:avLst/>
@@ -3390,32 +3330,32 @@
           <a:p>
             <a:pPr algn="l">
               <a:lnSpc>
-                <a:spcPts val="1015"/>
+                <a:spcPts val="754"/>
               </a:lnSpc>
             </a:pPr>
             <a:r>
-              <a:rPr sz="700" b="1">
+              <a:rPr sz="520" b="1" spc="120">
                 <a:solidFill>
-                  <a:srgbClr val="547499"/>
+                  <a:srgbClr val="6B7280"/>
                 </a:solidFill>
                 <a:latin typeface="맑은 고딕"/>
                 <a:ea typeface="맑은 고딕"/>
               </a:rPr>
-              <a:t>T</a:t>
-            </a:r>
-          </a:p>
-        </p:txBody>
-      </p:sp>
-      <p:sp>
-        <p:nvSpPr>
-          <p:cNvPr id="11" name="텍스트"/>
+              <a:t>TEL</a:t>
+            </a:r>
+          </a:p>
+        </p:txBody>
+      </p:sp>
+      <p:sp>
+        <p:nvSpPr>
+          <p:cNvPr id="9" name="텍스트"/>
           <p:cNvSpPr txBox="1"/>
           <p:nvPr/>
         </p:nvSpPr>
         <p:spPr>
           <a:xfrm>
-            <a:off x="360000" y="1008000"/>
-            <a:ext cx="1584000" cy="168911"/>
+            <a:off x="2023200" y="1317600"/>
+            <a:ext cx="1188000" cy="125731"/>
           </a:xfrm>
           <a:prstGeom prst="rect">
             <a:avLst/>
@@ -3430,13 +3370,13 @@
           <a:p>
             <a:pPr algn="l">
               <a:lnSpc>
-                <a:spcPts val="1015"/>
+                <a:spcPts val="956"/>
               </a:lnSpc>
             </a:pPr>
             <a:r>
-              <a:rPr sz="700" b="0">
+              <a:rPr sz="660" b="0">
                 <a:solidFill>
-                  <a:srgbClr val="3A5E88"/>
+                  <a:srgbClr val="12151C"/>
                 </a:solidFill>
                 <a:latin typeface="맑은 고딕"/>
                 <a:ea typeface="맑은 고딕"/>
@@ -3448,14 +3388,14 @@
       </p:sp>
       <p:sp>
         <p:nvSpPr>
-          <p:cNvPr id="12" name="텍스트"/>
+          <p:cNvPr id="10" name="텍스트"/>
           <p:cNvSpPr txBox="1"/>
           <p:nvPr/>
         </p:nvSpPr>
         <p:spPr>
           <a:xfrm>
-            <a:off x="216000" y="1176911"/>
-            <a:ext cx="122400" cy="168911"/>
+            <a:off x="1692000" y="1458000"/>
+            <a:ext cx="331200" cy="99061"/>
           </a:xfrm>
           <a:prstGeom prst="rect">
             <a:avLst/>
@@ -3470,32 +3410,32 @@
           <a:p>
             <a:pPr algn="l">
               <a:lnSpc>
-                <a:spcPts val="1015"/>
+                <a:spcPts val="754"/>
               </a:lnSpc>
             </a:pPr>
             <a:r>
-              <a:rPr sz="700" b="1">
+              <a:rPr sz="520" b="1" spc="120">
                 <a:solidFill>
-                  <a:srgbClr val="547499"/>
+                  <a:srgbClr val="6B7280"/>
                 </a:solidFill>
                 <a:latin typeface="맑은 고딕"/>
                 <a:ea typeface="맑은 고딕"/>
               </a:rPr>
-              <a:t>E</a:t>
-            </a:r>
-          </a:p>
-        </p:txBody>
-      </p:sp>
-      <p:sp>
-        <p:nvSpPr>
-          <p:cNvPr id="13" name="텍스트"/>
+              <a:t>MAIL</a:t>
+            </a:r>
+          </a:p>
+        </p:txBody>
+      </p:sp>
+      <p:sp>
+        <p:nvSpPr>
+          <p:cNvPr id="11" name="텍스트"/>
           <p:cNvSpPr txBox="1"/>
           <p:nvPr/>
         </p:nvSpPr>
         <p:spPr>
           <a:xfrm>
-            <a:off x="360000" y="1176911"/>
-            <a:ext cx="1584000" cy="168911"/>
+            <a:off x="2023200" y="1447200"/>
+            <a:ext cx="1188000" cy="125731"/>
           </a:xfrm>
           <a:prstGeom prst="rect">
             <a:avLst/>
@@ -3510,13 +3450,13 @@
           <a:p>
             <a:pPr algn="l">
               <a:lnSpc>
-                <a:spcPts val="1015"/>
+                <a:spcPts val="956"/>
               </a:lnSpc>
             </a:pPr>
             <a:r>
-              <a:rPr sz="700" b="0">
+              <a:rPr sz="660" b="0">
                 <a:solidFill>
-                  <a:srgbClr val="3A5E88"/>
+                  <a:srgbClr val="12151C"/>
                 </a:solidFill>
                 <a:latin typeface="맑은 고딕"/>
                 <a:ea typeface="맑은 고딕"/>
@@ -3528,14 +3468,14 @@
       </p:sp>
       <p:sp>
         <p:nvSpPr>
-          <p:cNvPr id="14" name="텍스트"/>
+          <p:cNvPr id="12" name="텍스트"/>
           <p:cNvSpPr txBox="1"/>
           <p:nvPr/>
         </p:nvSpPr>
         <p:spPr>
           <a:xfrm>
-            <a:off x="216000" y="1345822"/>
-            <a:ext cx="122400" cy="168911"/>
+            <a:off x="1692000" y="1587600"/>
+            <a:ext cx="331200" cy="99061"/>
           </a:xfrm>
           <a:prstGeom prst="rect">
             <a:avLst/>
@@ -3550,32 +3490,32 @@
           <a:p>
             <a:pPr algn="l">
               <a:lnSpc>
-                <a:spcPts val="1015"/>
+                <a:spcPts val="754"/>
               </a:lnSpc>
             </a:pPr>
             <a:r>
-              <a:rPr sz="700" b="1">
+              <a:rPr sz="520" b="1" spc="120">
                 <a:solidFill>
-                  <a:srgbClr val="547499"/>
+                  <a:srgbClr val="6B7280"/>
                 </a:solidFill>
                 <a:latin typeface="맑은 고딕"/>
                 <a:ea typeface="맑은 고딕"/>
               </a:rPr>
-              <a:t>A</a:t>
-            </a:r>
-          </a:p>
-        </p:txBody>
-      </p:sp>
-      <p:sp>
-        <p:nvSpPr>
-          <p:cNvPr id="15" name="텍스트"/>
+              <a:t>ADDR</a:t>
+            </a:r>
+          </a:p>
+        </p:txBody>
+      </p:sp>
+      <p:sp>
+        <p:nvSpPr>
+          <p:cNvPr id="13" name="텍스트"/>
           <p:cNvSpPr txBox="1"/>
           <p:nvPr/>
         </p:nvSpPr>
         <p:spPr>
           <a:xfrm>
-            <a:off x="360000" y="1345822"/>
-            <a:ext cx="1584000" cy="168911"/>
+            <a:off x="2023200" y="1576800"/>
+            <a:ext cx="1188000" cy="125731"/>
           </a:xfrm>
           <a:prstGeom prst="rect">
             <a:avLst/>
@@ -3590,13 +3530,13 @@
           <a:p>
             <a:pPr algn="l">
               <a:lnSpc>
-                <a:spcPts val="1015"/>
+                <a:spcPts val="956"/>
               </a:lnSpc>
             </a:pPr>
             <a:r>
-              <a:rPr sz="700" b="0">
+              <a:rPr sz="660" b="0">
                 <a:solidFill>
-                  <a:srgbClr val="3A5E88"/>
+                  <a:srgbClr val="12151C"/>
                 </a:solidFill>
                 <a:latin typeface="맑은 고딕"/>
                 <a:ea typeface="맑은 고딕"/>
@@ -3620,7 +3560,7 @@
     <p:bg>
       <p:bgPr>
         <a:solidFill>
-          <a:srgbClr val="FFFFFF"/>
+          <a:srgbClr val="F3F4F6"/>
         </a:solidFill>
         <a:effectLst/>
       </p:bgPr>
@@ -3634,14 +3574,43 @@
       <p:grpSpPr/>
       <p:sp>
         <p:nvSpPr>
-          <p:cNvPr id="2" name="Freeform 1"/>
+          <p:cNvPr id="2" name="Rectangle 1"/>
           <p:cNvSpPr/>
           <p:nvPr/>
         </p:nvSpPr>
         <p:spPr>
           <a:xfrm>
-            <a:off x="2016000" y="576000"/>
-            <a:ext cx="1224000" cy="1224000"/>
+            <a:off x="0" y="0"/>
+            <a:ext cx="3240000" cy="1800000"/>
+          </a:xfrm>
+          <a:prstGeom prst="rect">
+            <a:avLst/>
+          </a:prstGeom>
+          <a:solidFill>
+            <a:srgbClr val="B5123E"/>
+          </a:solidFill>
+          <a:ln>
+            <a:noFill/>
+          </a:ln>
+        </p:spPr>
+        <p:txBody>
+          <a:bodyPr rtlCol="0" anchor="ctr"/>
+          <a:lstStyle/>
+          <a:p>
+            <a:pPr algn="ctr"/>
+          </a:p>
+        </p:txBody>
+      </p:sp>
+      <p:sp>
+        <p:nvSpPr>
+          <p:cNvPr id="3" name="Freeform 2"/>
+          <p:cNvSpPr/>
+          <p:nvPr/>
+        </p:nvSpPr>
+        <p:spPr>
+          <a:xfrm>
+            <a:off x="2412000" y="972000"/>
+            <a:ext cx="828000" cy="828000"/>
           </a:xfrm>
           <a:custGeom>
             <a:avLst/>
@@ -3650,61 +3619,91 @@
             <a:cxnLst/>
             <a:rect l="l" t="t" r="r" b="b"/>
             <a:pathLst>
-              <a:path w="1224000" h="1224000">
+              <a:path w="828000" h="828000">
                 <a:moveTo>
-                  <a:pt x="1224000" y="1224000"/>
+                  <a:pt x="828000" y="828000"/>
                 </a:moveTo>
                 <a:lnTo>
-                  <a:pt x="0" y="1224000"/>
+                  <a:pt x="0" y="828000"/>
                 </a:lnTo>
                 <a:lnTo>
-                  <a:pt x="7696" y="1086955"/>
+                  <a:pt x="1773" y="773846"/>
                 </a:lnTo>
                 <a:lnTo>
-                  <a:pt x="30688" y="951634"/>
+                  <a:pt x="7084" y="719924"/>
                 </a:lnTo>
                 <a:lnTo>
-                  <a:pt x="68687" y="819738"/>
+                  <a:pt x="15910" y="666465"/>
                 </a:lnTo>
                 <a:lnTo>
-                  <a:pt x="121214" y="692926"/>
+                  <a:pt x="28213" y="613698"/>
                 </a:lnTo>
                 <a:lnTo>
-                  <a:pt x="187610" y="572793"/>
+                  <a:pt x="43942" y="561848"/>
                 </a:lnTo>
                 <a:lnTo>
-                  <a:pt x="267038" y="460848"/>
+                  <a:pt x="63028" y="511138"/>
                 </a:lnTo>
                 <a:lnTo>
-                  <a:pt x="358501" y="358501"/>
+                  <a:pt x="85389" y="461785"/>
                 </a:lnTo>
                 <a:lnTo>
-                  <a:pt x="460848" y="267038"/>
+                  <a:pt x="110931" y="414000"/>
                 </a:lnTo>
                 <a:lnTo>
-                  <a:pt x="572793" y="187610"/>
+                  <a:pt x="139543" y="367988"/>
                 </a:lnTo>
                 <a:lnTo>
-                  <a:pt x="692926" y="121214"/>
+                  <a:pt x="171103" y="323946"/>
                 </a:lnTo>
                 <a:lnTo>
-                  <a:pt x="819738" y="68687"/>
+                  <a:pt x="205477" y="282062"/>
                 </a:lnTo>
                 <a:lnTo>
-                  <a:pt x="951634" y="30688"/>
+                  <a:pt x="242516" y="242516"/>
                 </a:lnTo>
                 <a:lnTo>
-                  <a:pt x="1086955" y="7696"/>
+                  <a:pt x="282062" y="205477"/>
                 </a:lnTo>
                 <a:lnTo>
-                  <a:pt x="1224000" y="0"/>
+                  <a:pt x="323946" y="171103"/>
+                </a:lnTo>
+                <a:lnTo>
+                  <a:pt x="367988" y="139543"/>
+                </a:lnTo>
+                <a:lnTo>
+                  <a:pt x="414000" y="110931"/>
+                </a:lnTo>
+                <a:lnTo>
+                  <a:pt x="461785" y="85389"/>
+                </a:lnTo>
+                <a:lnTo>
+                  <a:pt x="511138" y="63028"/>
+                </a:lnTo>
+                <a:lnTo>
+                  <a:pt x="561848" y="43942"/>
+                </a:lnTo>
+                <a:lnTo>
+                  <a:pt x="613698" y="28213"/>
+                </a:lnTo>
+                <a:lnTo>
+                  <a:pt x="666465" y="15910"/>
+                </a:lnTo>
+                <a:lnTo>
+                  <a:pt x="719924" y="7084"/>
+                </a:lnTo>
+                <a:lnTo>
+                  <a:pt x="773846" y="1773"/>
+                </a:lnTo>
+                <a:lnTo>
+                  <a:pt x="828000" y="0"/>
                 </a:lnTo>
                 <a:close/>
               </a:path>
             </a:pathLst>
           </a:custGeom>
           <a:solidFill>
-            <a:srgbClr val="6991BF"/>
+            <a:srgbClr val="C54668"/>
           </a:solidFill>
           <a:ln>
             <a:noFill/>
@@ -3720,191 +3719,14 @@
       </p:sp>
       <p:sp>
         <p:nvSpPr>
-          <p:cNvPr id="3" name="Freeform 2"/>
-          <p:cNvSpPr/>
+          <p:cNvPr id="4" name="텍스트"/>
+          <p:cNvSpPr txBox="1"/>
           <p:nvPr/>
         </p:nvSpPr>
         <p:spPr>
           <a:xfrm>
-            <a:off x="2520000" y="1080000"/>
-            <a:ext cx="720000" cy="720000"/>
-          </a:xfrm>
-          <a:custGeom>
-            <a:avLst/>
-            <a:gdLst/>
-            <a:ahLst/>
-            <a:cxnLst/>
-            <a:rect l="l" t="t" r="r" b="b"/>
-            <a:pathLst>
-              <a:path w="720000" h="720000">
-                <a:moveTo>
-                  <a:pt x="720000" y="720000"/>
-                </a:moveTo>
-                <a:lnTo>
-                  <a:pt x="0" y="720000"/>
-                </a:lnTo>
-                <a:lnTo>
-                  <a:pt x="4527" y="639386"/>
-                </a:lnTo>
-                <a:lnTo>
-                  <a:pt x="18052" y="559785"/>
-                </a:lnTo>
-                <a:lnTo>
-                  <a:pt x="40404" y="482199"/>
-                </a:lnTo>
-                <a:lnTo>
-                  <a:pt x="71302" y="407604"/>
-                </a:lnTo>
-                <a:lnTo>
-                  <a:pt x="110359" y="336937"/>
-                </a:lnTo>
-                <a:lnTo>
-                  <a:pt x="157081" y="271087"/>
-                </a:lnTo>
-                <a:lnTo>
-                  <a:pt x="210883" y="210883"/>
-                </a:lnTo>
-                <a:lnTo>
-                  <a:pt x="271087" y="157081"/>
-                </a:lnTo>
-                <a:lnTo>
-                  <a:pt x="336937" y="110359"/>
-                </a:lnTo>
-                <a:lnTo>
-                  <a:pt x="407604" y="71302"/>
-                </a:lnTo>
-                <a:lnTo>
-                  <a:pt x="482199" y="40404"/>
-                </a:lnTo>
-                <a:lnTo>
-                  <a:pt x="559785" y="18052"/>
-                </a:lnTo>
-                <a:lnTo>
-                  <a:pt x="639386" y="4527"/>
-                </a:lnTo>
-                <a:lnTo>
-                  <a:pt x="720000" y="0"/>
-                </a:lnTo>
-                <a:close/>
-              </a:path>
-            </a:pathLst>
-          </a:custGeom>
-          <a:solidFill>
-            <a:srgbClr val="D3DFEE"/>
-          </a:solidFill>
-          <a:ln>
-            <a:noFill/>
-          </a:ln>
-        </p:spPr>
-        <p:txBody>
-          <a:bodyPr rtlCol="0" anchor="ctr"/>
-          <a:lstStyle/>
-          <a:p>
-            <a:pPr algn="ctr"/>
-          </a:p>
-        </p:txBody>
-      </p:sp>
-      <p:sp>
-        <p:nvSpPr>
-          <p:cNvPr id="4" name="Oval 3"/>
-          <p:cNvSpPr/>
-          <p:nvPr/>
-        </p:nvSpPr>
-        <p:spPr>
-          <a:xfrm>
-            <a:off x="2811960" y="1372680"/>
-            <a:ext cx="136080" cy="136080"/>
-          </a:xfrm>
-          <a:prstGeom prst="ellipse">
-            <a:avLst/>
-          </a:prstGeom>
-          <a:solidFill>
-            <a:srgbClr val="FFFFFF"/>
-          </a:solidFill>
-          <a:ln>
-            <a:noFill/>
-          </a:ln>
-        </p:spPr>
-        <p:txBody>
-          <a:bodyPr rtlCol="0" anchor="ctr"/>
-          <a:lstStyle/>
-          <a:p>
-            <a:pPr algn="ctr"/>
-          </a:p>
-        </p:txBody>
-      </p:sp>
-      <p:sp>
-        <p:nvSpPr>
-          <p:cNvPr id="5" name="Rounded Rectangle 4"/>
-          <p:cNvSpPr/>
-          <p:nvPr/>
-        </p:nvSpPr>
-        <p:spPr>
-          <a:xfrm>
-            <a:off x="2847240" y="1506240"/>
-            <a:ext cx="65520" cy="40320"/>
-          </a:xfrm>
-          <a:prstGeom prst="roundRect">
-            <a:avLst>
-              <a:gd name="adj" fmla="val 18749"/>
-            </a:avLst>
-          </a:prstGeom>
-          <a:solidFill>
-            <a:srgbClr val="737373"/>
-          </a:solidFill>
-          <a:ln>
-            <a:noFill/>
-          </a:ln>
-        </p:spPr>
-        <p:txBody>
-          <a:bodyPr rtlCol="0" anchor="ctr"/>
-          <a:lstStyle/>
-          <a:p>
-            <a:pPr algn="ctr"/>
-          </a:p>
-        </p:txBody>
-      </p:sp>
-      <p:sp>
-        <p:nvSpPr>
-          <p:cNvPr id="6" name="Rounded Rectangle 5"/>
-          <p:cNvSpPr/>
-          <p:nvPr/>
-        </p:nvSpPr>
-        <p:spPr>
-          <a:xfrm>
-            <a:off x="2857320" y="1554120"/>
-            <a:ext cx="45360" cy="22680"/>
-          </a:xfrm>
-          <a:prstGeom prst="roundRect">
-            <a:avLst>
-              <a:gd name="adj" fmla="val 33333"/>
-            </a:avLst>
-          </a:prstGeom>
-          <a:solidFill>
-            <a:srgbClr val="737373"/>
-          </a:solidFill>
-          <a:ln>
-            <a:noFill/>
-          </a:ln>
-        </p:spPr>
-        <p:txBody>
-          <a:bodyPr rtlCol="0" anchor="ctr"/>
-          <a:lstStyle/>
-          <a:p>
-            <a:pPr algn="ctr"/>
-          </a:p>
-        </p:txBody>
-      </p:sp>
-      <p:sp>
-        <p:nvSpPr>
-          <p:cNvPr id="7" name="텍스트"/>
-          <p:cNvSpPr txBox="1"/>
-          <p:nvPr/>
-        </p:nvSpPr>
-        <p:spPr>
-          <a:xfrm>
-            <a:off x="252000" y="324000"/>
-            <a:ext cx="1944000" cy="720000"/>
+            <a:off x="252000" y="432000"/>
+            <a:ext cx="2304000" cy="720000"/>
           </a:xfrm>
           <a:prstGeom prst="rect">
             <a:avLst/>
@@ -3919,49 +3741,32 @@
           <a:p>
             <a:pPr algn="l">
               <a:lnSpc>
-                <a:spcPts val="1739"/>
+                <a:spcPts val="1884"/>
               </a:lnSpc>
             </a:pPr>
             <a:r>
-              <a:rPr sz="1200" b="1">
+              <a:rPr sz="1300" b="1">
                 <a:solidFill>
-                  <a:srgbClr val="3A5E88"/>
+                  <a:srgbClr val="FFFFFF"/>
                 </a:solidFill>
                 <a:latin typeface="맑은 고딕"/>
                 <a:ea typeface="맑은 고딕"/>
               </a:rPr>
-              <a:t>영상이 되어</a:t>
-            </a:r>
-          </a:p>
-          <a:p>
-            <a:pPr algn="l">
-              <a:lnSpc>
-                <a:spcPts val="1739"/>
-              </a:lnSpc>
-            </a:pPr>
-            <a:r>
-              <a:rPr sz="1200" b="1">
-                <a:solidFill>
-                  <a:srgbClr val="3A5E88"/>
-                </a:solidFill>
-                <a:latin typeface="맑은 고딕"/>
-                <a:ea typeface="맑은 고딕"/>
-              </a:rPr>
-              <a:t>오래 기억되도록</a:t>
-            </a:r>
-          </a:p>
-        </p:txBody>
-      </p:sp>
-      <p:sp>
-        <p:nvSpPr>
-          <p:cNvPr id="8" name="텍스트"/>
+              <a:t>영상이 되어 오래 기억되도록</a:t>
+            </a:r>
+          </a:p>
+        </p:txBody>
+      </p:sp>
+      <p:sp>
+        <p:nvSpPr>
+          <p:cNvPr id="5" name="텍스트"/>
           <p:cNvSpPr txBox="1"/>
           <p:nvPr/>
         </p:nvSpPr>
         <p:spPr>
           <a:xfrm>
             <a:off x="252000" y="1476000"/>
-            <a:ext cx="1440000" cy="108000"/>
+            <a:ext cx="1800000" cy="133351"/>
           </a:xfrm>
           <a:prstGeom prst="rect">
             <a:avLst/>
@@ -3976,13 +3781,13 @@
           <a:p>
             <a:pPr algn="l">
               <a:lnSpc>
-                <a:spcPts val="1087"/>
+                <a:spcPts val="1015"/>
               </a:lnSpc>
             </a:pPr>
             <a:r>
-              <a:rPr sz="750" b="1" spc="200">
+              <a:rPr sz="700" b="1" spc="200">
                 <a:solidFill>
-                  <a:srgbClr val="66788E"/>
+                  <a:srgbClr val="FFFFFF"/>
                 </a:solidFill>
                 <a:latin typeface="맑은 고딕"/>
                 <a:ea typeface="맑은 고딕"/>

--- a/public/fun/cards/creative/creative-19.pptx
+++ b/public/fun/cards/creative/creative-19.pptx
@@ -3097,196 +3097,37 @@
         <p:nvPr/>
       </p:nvGrpSpPr>
       <p:grpSpPr/>
-      <p:sp>
-        <p:nvSpPr>
-          <p:cNvPr id="2" name="Oval 1"/>
+      <p:cxnSp>
+        <p:nvCxnSpPr>
+          <p:cNvPr id="2" name="Connector 1"/>
+          <p:cNvCxnSpPr/>
+          <p:nvPr/>
+        </p:nvCxnSpPr>
+        <p:spPr>
+          <a:xfrm>
+            <a:off x="1080000" y="252000"/>
+            <a:ext cx="0" cy="1296000"/>
+          </a:xfrm>
+          <a:prstGeom prst="line">
+            <a:avLst/>
+          </a:prstGeom>
+          <a:ln w="3600">
+            <a:solidFill>
+              <a:srgbClr val="E3E5E9"/>
+            </a:solidFill>
+          </a:ln>
+        </p:spPr>
+      </p:cxnSp>
+      <p:sp>
+        <p:nvSpPr>
+          <p:cNvPr id="3" name="Rectangle 2"/>
           <p:cNvSpPr/>
           <p:nvPr/>
         </p:nvSpPr>
         <p:spPr>
           <a:xfrm>
-            <a:off x="547200" y="475200"/>
-            <a:ext cx="849600" cy="849600"/>
-          </a:xfrm>
-          <a:prstGeom prst="ellipse">
-            <a:avLst/>
-          </a:prstGeom>
-          <a:solidFill>
-            <a:srgbClr val="F5DEE4"/>
-          </a:solidFill>
-          <a:ln>
-            <a:noFill/>
-          </a:ln>
-        </p:spPr>
-        <p:txBody>
-          <a:bodyPr rtlCol="0" anchor="ctr"/>
-          <a:lstStyle/>
-          <a:p>
-            <a:pPr algn="ctr"/>
-          </a:p>
-        </p:txBody>
-      </p:sp>
-      <p:sp>
-        <p:nvSpPr>
-          <p:cNvPr id="3" name="Oval 2"/>
-          <p:cNvSpPr/>
-          <p:nvPr/>
-        </p:nvSpPr>
-        <p:spPr>
-          <a:xfrm>
-            <a:off x="187200" y="475200"/>
-            <a:ext cx="849600" cy="849600"/>
-          </a:xfrm>
-          <a:prstGeom prst="ellipse">
-            <a:avLst/>
-          </a:prstGeom>
-          <a:solidFill>
-            <a:srgbClr val="B5123E">
-              <a:alpha val="92000"/>
-            </a:srgbClr>
-          </a:solidFill>
-          <a:ln>
-            <a:noFill/>
-          </a:ln>
-        </p:spPr>
-        <p:txBody>
-          <a:bodyPr rtlCol="0" anchor="ctr"/>
-          <a:lstStyle/>
-          <a:p>
-            <a:pPr algn="ctr"/>
-          </a:p>
-        </p:txBody>
-      </p:sp>
-      <p:sp>
-        <p:nvSpPr>
-          <p:cNvPr id="4" name="텍스트"/>
-          <p:cNvSpPr txBox="1"/>
-          <p:nvPr/>
-        </p:nvSpPr>
-        <p:spPr>
-          <a:xfrm>
-            <a:off x="1692000" y="223200"/>
-            <a:ext cx="1296000" cy="133351"/>
-          </a:xfrm>
-          <a:prstGeom prst="rect">
-            <a:avLst/>
-          </a:prstGeom>
-          <a:noFill/>
-        </p:spPr>
-        <p:txBody>
-          <a:bodyPr wrap="square" lIns="0" rIns="0" tIns="0" bIns="0" anchor="t">
-            <a:spAutoFit/>
-          </a:bodyPr>
-          <a:lstStyle/>
-          <a:p>
-            <a:pPr algn="l">
-              <a:lnSpc>
-                <a:spcPts val="1015"/>
-              </a:lnSpc>
-            </a:pPr>
-            <a:r>
-              <a:rPr sz="700" b="1" spc="200">
-                <a:solidFill>
-                  <a:srgbClr val="6B7280"/>
-                </a:solidFill>
-                <a:latin typeface="맑은 고딕"/>
-                <a:ea typeface="맑은 고딕"/>
-              </a:rPr>
-              <a:t>스튜디오 이름</a:t>
-            </a:r>
-          </a:p>
-        </p:txBody>
-      </p:sp>
-      <p:sp>
-        <p:nvSpPr>
-          <p:cNvPr id="5" name="텍스트"/>
-          <p:cNvSpPr txBox="1"/>
-          <p:nvPr/>
-        </p:nvSpPr>
-        <p:spPr>
-          <a:xfrm>
-            <a:off x="1692000" y="540000"/>
-            <a:ext cx="1368000" cy="360000"/>
-          </a:xfrm>
-          <a:prstGeom prst="rect">
-            <a:avLst/>
-          </a:prstGeom>
-          <a:noFill/>
-        </p:spPr>
-        <p:txBody>
-          <a:bodyPr wrap="square" lIns="0" rIns="0" tIns="0" bIns="0" anchor="t">
-            <a:spAutoFit/>
-          </a:bodyPr>
-          <a:lstStyle/>
-          <a:p>
-            <a:pPr algn="l">
-              <a:lnSpc>
-                <a:spcPts val="3190"/>
-              </a:lnSpc>
-            </a:pPr>
-            <a:r>
-              <a:rPr sz="2200" b="1">
-                <a:solidFill>
-                  <a:srgbClr val="12151C"/>
-                </a:solidFill>
-                <a:latin typeface="맑은 고딕"/>
-                <a:ea typeface="맑은 고딕"/>
-              </a:rPr>
-              <a:t>전보라</a:t>
-            </a:r>
-          </a:p>
-        </p:txBody>
-      </p:sp>
-      <p:sp>
-        <p:nvSpPr>
-          <p:cNvPr id="6" name="텍스트"/>
-          <p:cNvSpPr txBox="1"/>
-          <p:nvPr/>
-        </p:nvSpPr>
-        <p:spPr>
-          <a:xfrm>
-            <a:off x="1692000" y="943200"/>
-            <a:ext cx="1368000" cy="171451"/>
-          </a:xfrm>
-          <a:prstGeom prst="rect">
-            <a:avLst/>
-          </a:prstGeom>
-          <a:noFill/>
-        </p:spPr>
-        <p:txBody>
-          <a:bodyPr wrap="square" lIns="0" rIns="0" tIns="0" bIns="0" anchor="t">
-            <a:spAutoFit/>
-          </a:bodyPr>
-          <a:lstStyle/>
-          <a:p>
-            <a:pPr algn="l">
-              <a:lnSpc>
-                <a:spcPts val="1305"/>
-              </a:lnSpc>
-            </a:pPr>
-            <a:r>
-              <a:rPr sz="900" b="0">
-                <a:solidFill>
-                  <a:srgbClr val="6B7280"/>
-                </a:solidFill>
-                <a:latin typeface="맑은 고딕"/>
-                <a:ea typeface="맑은 고딕"/>
-              </a:rPr>
-              <a:t>캘리그라피 작가</a:t>
-            </a:r>
-          </a:p>
-        </p:txBody>
-      </p:sp>
-      <p:sp>
-        <p:nvSpPr>
-          <p:cNvPr id="7" name="Rectangle 6"/>
-          <p:cNvSpPr/>
-          <p:nvPr/>
-        </p:nvSpPr>
-        <p:spPr>
-          <a:xfrm>
-            <a:off x="1692000" y="1195200"/>
-            <a:ext cx="144000" cy="18000"/>
+            <a:off x="1069200" y="252000"/>
+            <a:ext cx="21600" cy="201600"/>
           </a:xfrm>
           <a:prstGeom prst="rect">
             <a:avLst/>
@@ -3308,14 +3149,14 @@
       </p:sp>
       <p:sp>
         <p:nvSpPr>
-          <p:cNvPr id="8" name="텍스트"/>
+          <p:cNvPr id="4" name="텍스트"/>
           <p:cNvSpPr txBox="1"/>
           <p:nvPr/>
         </p:nvSpPr>
         <p:spPr>
           <a:xfrm>
-            <a:off x="1692000" y="1328400"/>
-            <a:ext cx="331200" cy="99061"/>
+            <a:off x="252000" y="252000"/>
+            <a:ext cx="756000" cy="123826"/>
           </a:xfrm>
           <a:prstGeom prst="rect">
             <a:avLst/>
@@ -3330,11 +3171,221 @@
           <a:p>
             <a:pPr algn="l">
               <a:lnSpc>
-                <a:spcPts val="754"/>
+                <a:spcPts val="942"/>
               </a:lnSpc>
             </a:pPr>
             <a:r>
-              <a:rPr sz="520" b="1" spc="120">
+              <a:rPr sz="650" b="1" spc="220">
+                <a:solidFill>
+                  <a:srgbClr val="6B7280"/>
+                </a:solidFill>
+                <a:latin typeface="맑은 고딕"/>
+                <a:ea typeface="맑은 고딕"/>
+              </a:rPr>
+              <a:t>스튜디오 이름</a:t>
+            </a:r>
+          </a:p>
+        </p:txBody>
+      </p:sp>
+      <p:sp>
+        <p:nvSpPr>
+          <p:cNvPr id="5" name="Oval 4"/>
+          <p:cNvSpPr/>
+          <p:nvPr/>
+        </p:nvSpPr>
+        <p:spPr>
+          <a:xfrm>
+            <a:off x="273600" y="734400"/>
+            <a:ext cx="244800" cy="244800"/>
+          </a:xfrm>
+          <a:prstGeom prst="ellipse">
+            <a:avLst/>
+          </a:prstGeom>
+          <a:noFill/>
+          <a:ln w="5040">
+            <a:solidFill>
+              <a:srgbClr val="B5123E"/>
+            </a:solidFill>
+          </a:ln>
+        </p:spPr>
+        <p:txBody>
+          <a:bodyPr rtlCol="0" anchor="ctr"/>
+          <a:lstStyle/>
+          <a:p>
+            <a:pPr algn="ctr"/>
+          </a:p>
+        </p:txBody>
+      </p:sp>
+      <p:sp>
+        <p:nvSpPr>
+          <p:cNvPr id="6" name="텍스트"/>
+          <p:cNvSpPr txBox="1"/>
+          <p:nvPr/>
+        </p:nvSpPr>
+        <p:spPr>
+          <a:xfrm>
+            <a:off x="252000" y="734400"/>
+            <a:ext cx="288000" cy="252000"/>
+          </a:xfrm>
+          <a:prstGeom prst="rect">
+            <a:avLst/>
+          </a:prstGeom>
+          <a:noFill/>
+        </p:spPr>
+        <p:txBody>
+          <a:bodyPr wrap="square" lIns="0" rIns="0" tIns="0" bIns="0" anchor="ctr">
+            <a:spAutoFit/>
+          </a:bodyPr>
+          <a:lstStyle/>
+          <a:p>
+            <a:pPr algn="ctr">
+              <a:lnSpc>
+                <a:spcPts val="1305"/>
+              </a:lnSpc>
+            </a:pPr>
+            <a:r>
+              <a:rPr sz="900" b="1">
+                <a:solidFill>
+                  <a:srgbClr val="B5123E"/>
+                </a:solidFill>
+                <a:latin typeface="맑은 고딕"/>
+                <a:ea typeface="맑은 고딕"/>
+              </a:rPr>
+              <a:t>스</a:t>
+            </a:r>
+          </a:p>
+        </p:txBody>
+      </p:sp>
+      <p:sp>
+        <p:nvSpPr>
+          <p:cNvPr id="7" name="텍스트"/>
+          <p:cNvSpPr txBox="1"/>
+          <p:nvPr/>
+        </p:nvSpPr>
+        <p:spPr>
+          <a:xfrm>
+            <a:off x="1260000" y="432000"/>
+            <a:ext cx="1800000" cy="237600"/>
+          </a:xfrm>
+          <a:prstGeom prst="rect">
+            <a:avLst/>
+          </a:prstGeom>
+          <a:noFill/>
+        </p:spPr>
+        <p:txBody>
+          <a:bodyPr wrap="square" lIns="0" rIns="0" tIns="0" bIns="0" anchor="t">
+            <a:spAutoFit/>
+          </a:bodyPr>
+          <a:lstStyle/>
+          <a:p>
+            <a:pPr algn="l">
+              <a:lnSpc>
+                <a:spcPts val="1957"/>
+              </a:lnSpc>
+            </a:pPr>
+            <a:r>
+              <a:rPr sz="1350" b="1" spc="120">
+                <a:solidFill>
+                  <a:srgbClr val="12151C"/>
+                </a:solidFill>
+                <a:latin typeface="맑은 고딕"/>
+                <a:ea typeface="맑은 고딕"/>
+              </a:rPr>
+              <a:t>전보라</a:t>
+            </a:r>
+          </a:p>
+        </p:txBody>
+      </p:sp>
+      <p:sp>
+        <p:nvSpPr>
+          <p:cNvPr id="8" name="텍스트"/>
+          <p:cNvSpPr txBox="1"/>
+          <p:nvPr/>
+        </p:nvSpPr>
+        <p:spPr>
+          <a:xfrm>
+            <a:off x="1260000" y="684000"/>
+            <a:ext cx="1800000" cy="133351"/>
+          </a:xfrm>
+          <a:prstGeom prst="rect">
+            <a:avLst/>
+          </a:prstGeom>
+          <a:noFill/>
+        </p:spPr>
+        <p:txBody>
+          <a:bodyPr wrap="square" lIns="0" rIns="0" tIns="0" bIns="0" anchor="t">
+            <a:spAutoFit/>
+          </a:bodyPr>
+          <a:lstStyle/>
+          <a:p>
+            <a:pPr algn="l">
+              <a:lnSpc>
+                <a:spcPts val="1015"/>
+              </a:lnSpc>
+            </a:pPr>
+            <a:r>
+              <a:rPr sz="700" b="0" spc="60">
+                <a:solidFill>
+                  <a:srgbClr val="6B7280"/>
+                </a:solidFill>
+                <a:latin typeface="맑은 고딕"/>
+                <a:ea typeface="맑은 고딕"/>
+              </a:rPr>
+              <a:t>캘리그라피 작가</a:t>
+            </a:r>
+          </a:p>
+        </p:txBody>
+      </p:sp>
+      <p:cxnSp>
+        <p:nvCxnSpPr>
+          <p:cNvPr id="9" name="Connector 8"/>
+          <p:cNvCxnSpPr/>
+          <p:nvPr/>
+        </p:nvCxnSpPr>
+        <p:spPr>
+          <a:xfrm>
+            <a:off x="1260000" y="943200"/>
+            <a:ext cx="1728000" cy="0"/>
+          </a:xfrm>
+          <a:prstGeom prst="line">
+            <a:avLst/>
+          </a:prstGeom>
+          <a:ln w="3600">
+            <a:solidFill>
+              <a:srgbClr val="E3E5E9"/>
+            </a:solidFill>
+          </a:ln>
+        </p:spPr>
+      </p:cxnSp>
+      <p:sp>
+        <p:nvSpPr>
+          <p:cNvPr id="10" name="텍스트"/>
+          <p:cNvSpPr txBox="1"/>
+          <p:nvPr/>
+        </p:nvSpPr>
+        <p:spPr>
+          <a:xfrm>
+            <a:off x="1260000" y="1054800"/>
+            <a:ext cx="331200" cy="91441"/>
+          </a:xfrm>
+          <a:prstGeom prst="rect">
+            <a:avLst/>
+          </a:prstGeom>
+          <a:noFill/>
+        </p:spPr>
+        <p:txBody>
+          <a:bodyPr wrap="square" lIns="0" rIns="0" tIns="0" bIns="0" anchor="t">
+            <a:spAutoFit/>
+          </a:bodyPr>
+          <a:lstStyle/>
+          <a:p>
+            <a:pPr algn="l">
+              <a:lnSpc>
+                <a:spcPts val="696"/>
+              </a:lnSpc>
+            </a:pPr>
+            <a:r>
+              <a:rPr sz="480" b="1" spc="140">
                 <a:solidFill>
                   <a:srgbClr val="6B7280"/>
                 </a:solidFill>
@@ -3348,14 +3399,14 @@
       </p:sp>
       <p:sp>
         <p:nvSpPr>
-          <p:cNvPr id="9" name="텍스트"/>
+          <p:cNvPr id="11" name="텍스트"/>
           <p:cNvSpPr txBox="1"/>
           <p:nvPr/>
         </p:nvSpPr>
         <p:spPr>
           <a:xfrm>
-            <a:off x="2023200" y="1317600"/>
-            <a:ext cx="1188000" cy="125731"/>
+            <a:off x="1591200" y="1044000"/>
+            <a:ext cx="1188000" cy="123826"/>
           </a:xfrm>
           <a:prstGeom prst="rect">
             <a:avLst/>
@@ -3370,11 +3421,11 @@
           <a:p>
             <a:pPr algn="l">
               <a:lnSpc>
-                <a:spcPts val="956"/>
+                <a:spcPts val="942"/>
               </a:lnSpc>
             </a:pPr>
             <a:r>
-              <a:rPr sz="660" b="0">
+              <a:rPr sz="650" b="0">
                 <a:solidFill>
                   <a:srgbClr val="12151C"/>
                 </a:solidFill>
@@ -3388,14 +3439,14 @@
       </p:sp>
       <p:sp>
         <p:nvSpPr>
-          <p:cNvPr id="10" name="텍스트"/>
+          <p:cNvPr id="12" name="텍스트"/>
           <p:cNvSpPr txBox="1"/>
           <p:nvPr/>
         </p:nvSpPr>
         <p:spPr>
           <a:xfrm>
-            <a:off x="1692000" y="1458000"/>
-            <a:ext cx="331200" cy="99061"/>
+            <a:off x="1260000" y="1184400"/>
+            <a:ext cx="331200" cy="91441"/>
           </a:xfrm>
           <a:prstGeom prst="rect">
             <a:avLst/>
@@ -3410,11 +3461,11 @@
           <a:p>
             <a:pPr algn="l">
               <a:lnSpc>
-                <a:spcPts val="754"/>
+                <a:spcPts val="696"/>
               </a:lnSpc>
             </a:pPr>
             <a:r>
-              <a:rPr sz="520" b="1" spc="120">
+              <a:rPr sz="480" b="1" spc="140">
                 <a:solidFill>
                   <a:srgbClr val="6B7280"/>
                 </a:solidFill>
@@ -3428,14 +3479,14 @@
       </p:sp>
       <p:sp>
         <p:nvSpPr>
-          <p:cNvPr id="11" name="텍스트"/>
+          <p:cNvPr id="13" name="텍스트"/>
           <p:cNvSpPr txBox="1"/>
           <p:nvPr/>
         </p:nvSpPr>
         <p:spPr>
           <a:xfrm>
-            <a:off x="2023200" y="1447200"/>
-            <a:ext cx="1188000" cy="125731"/>
+            <a:off x="1591200" y="1173600"/>
+            <a:ext cx="1188000" cy="123826"/>
           </a:xfrm>
           <a:prstGeom prst="rect">
             <a:avLst/>
@@ -3450,11 +3501,11 @@
           <a:p>
             <a:pPr algn="l">
               <a:lnSpc>
-                <a:spcPts val="956"/>
+                <a:spcPts val="942"/>
               </a:lnSpc>
             </a:pPr>
             <a:r>
-              <a:rPr sz="660" b="0">
+              <a:rPr sz="650" b="0">
                 <a:solidFill>
                   <a:srgbClr val="12151C"/>
                 </a:solidFill>
@@ -3468,14 +3519,14 @@
       </p:sp>
       <p:sp>
         <p:nvSpPr>
-          <p:cNvPr id="12" name="텍스트"/>
+          <p:cNvPr id="14" name="텍스트"/>
           <p:cNvSpPr txBox="1"/>
           <p:nvPr/>
         </p:nvSpPr>
         <p:spPr>
           <a:xfrm>
-            <a:off x="1692000" y="1587600"/>
-            <a:ext cx="331200" cy="99061"/>
+            <a:off x="1260000" y="1314000"/>
+            <a:ext cx="331200" cy="91441"/>
           </a:xfrm>
           <a:prstGeom prst="rect">
             <a:avLst/>
@@ -3490,11 +3541,11 @@
           <a:p>
             <a:pPr algn="l">
               <a:lnSpc>
-                <a:spcPts val="754"/>
+                <a:spcPts val="696"/>
               </a:lnSpc>
             </a:pPr>
             <a:r>
-              <a:rPr sz="520" b="1" spc="120">
+              <a:rPr sz="480" b="1" spc="140">
                 <a:solidFill>
                   <a:srgbClr val="6B7280"/>
                 </a:solidFill>
@@ -3508,14 +3559,14 @@
       </p:sp>
       <p:sp>
         <p:nvSpPr>
-          <p:cNvPr id="13" name="텍스트"/>
+          <p:cNvPr id="15" name="텍스트"/>
           <p:cNvSpPr txBox="1"/>
           <p:nvPr/>
         </p:nvSpPr>
         <p:spPr>
           <a:xfrm>
-            <a:off x="2023200" y="1576800"/>
-            <a:ext cx="1188000" cy="125731"/>
+            <a:off x="1591200" y="1303200"/>
+            <a:ext cx="1188000" cy="123826"/>
           </a:xfrm>
           <a:prstGeom prst="rect">
             <a:avLst/>
@@ -3530,11 +3581,11 @@
           <a:p>
             <a:pPr algn="l">
               <a:lnSpc>
-                <a:spcPts val="956"/>
+                <a:spcPts val="942"/>
               </a:lnSpc>
             </a:pPr>
             <a:r>
-              <a:rPr sz="660" b="0">
+              <a:rPr sz="650" b="0">
                 <a:solidFill>
                   <a:srgbClr val="12151C"/>
                 </a:solidFill>
@@ -3574,14 +3625,54 @@
       <p:grpSpPr/>
       <p:sp>
         <p:nvSpPr>
-          <p:cNvPr id="2" name="Rectangle 1"/>
+          <p:cNvPr id="2" name="텍스트"/>
+          <p:cNvSpPr txBox="1"/>
+          <p:nvPr/>
+        </p:nvSpPr>
+        <p:spPr>
+          <a:xfrm>
+            <a:off x="252000" y="252000"/>
+            <a:ext cx="1080000" cy="99061"/>
+          </a:xfrm>
+          <a:prstGeom prst="rect">
+            <a:avLst/>
+          </a:prstGeom>
+          <a:noFill/>
+        </p:spPr>
+        <p:txBody>
+          <a:bodyPr wrap="square" lIns="0" rIns="0" tIns="0" bIns="0" anchor="t">
+            <a:spAutoFit/>
+          </a:bodyPr>
+          <a:lstStyle/>
+          <a:p>
+            <a:pPr algn="l">
+              <a:lnSpc>
+                <a:spcPts val="754"/>
+              </a:lnSpc>
+            </a:pPr>
+            <a:r>
+              <a:rPr sz="520" b="1" spc="240">
+                <a:solidFill>
+                  <a:srgbClr val="6B7280"/>
+                </a:solidFill>
+                <a:latin typeface="맑은 고딕"/>
+                <a:ea typeface="맑은 고딕"/>
+              </a:rPr>
+              <a:t>작업 분야</a:t>
+            </a:r>
+          </a:p>
+        </p:txBody>
+      </p:sp>
+      <p:sp>
+        <p:nvSpPr>
+          <p:cNvPr id="3" name="Rectangle 2"/>
           <p:cNvSpPr/>
           <p:nvPr/>
         </p:nvSpPr>
         <p:spPr>
           <a:xfrm>
-            <a:off x="0" y="0"/>
-            <a:ext cx="3240000" cy="1800000"/>
+            <a:off x="252000" y="352800"/>
+            <a:ext cx="108000" cy="14400"/>
           </a:xfrm>
           <a:prstGeom prst="rect">
             <a:avLst/>
@@ -3601,109 +3692,447 @@
           </a:p>
         </p:txBody>
       </p:sp>
-      <p:sp>
-        <p:nvSpPr>
-          <p:cNvPr id="3" name="Freeform 2"/>
+      <p:cxnSp>
+        <p:nvCxnSpPr>
+          <p:cNvPr id="4" name="Connector 3"/>
+          <p:cNvCxnSpPr/>
+          <p:nvPr/>
+        </p:nvCxnSpPr>
+        <p:spPr>
+          <a:xfrm>
+            <a:off x="252000" y="453600"/>
+            <a:ext cx="1512000" cy="0"/>
+          </a:xfrm>
+          <a:prstGeom prst="line">
+            <a:avLst/>
+          </a:prstGeom>
+          <a:ln w="3600">
+            <a:solidFill>
+              <a:srgbClr val="DCDFE4"/>
+            </a:solidFill>
+          </a:ln>
+        </p:spPr>
+      </p:cxnSp>
+      <p:sp>
+        <p:nvSpPr>
+          <p:cNvPr id="5" name="텍스트"/>
+          <p:cNvSpPr txBox="1"/>
+          <p:nvPr/>
+        </p:nvSpPr>
+        <p:spPr>
+          <a:xfrm>
+            <a:off x="252000" y="507600"/>
+            <a:ext cx="216000" cy="95251"/>
+          </a:xfrm>
+          <a:prstGeom prst="rect">
+            <a:avLst/>
+          </a:prstGeom>
+          <a:noFill/>
+        </p:spPr>
+        <p:txBody>
+          <a:bodyPr wrap="square" lIns="0" rIns="0" tIns="0" bIns="0" anchor="t">
+            <a:spAutoFit/>
+          </a:bodyPr>
+          <a:lstStyle/>
+          <a:p>
+            <a:pPr algn="l">
+              <a:lnSpc>
+                <a:spcPts val="725"/>
+              </a:lnSpc>
+            </a:pPr>
+            <a:r>
+              <a:rPr sz="500" b="1" spc="100">
+                <a:solidFill>
+                  <a:srgbClr val="6B7280"/>
+                </a:solidFill>
+                <a:latin typeface="맑은 고딕"/>
+                <a:ea typeface="맑은 고딕"/>
+              </a:rPr>
+              <a:t>01</a:t>
+            </a:r>
+          </a:p>
+        </p:txBody>
+      </p:sp>
+      <p:sp>
+        <p:nvSpPr>
+          <p:cNvPr id="6" name="텍스트"/>
+          <p:cNvSpPr txBox="1"/>
+          <p:nvPr/>
+        </p:nvSpPr>
+        <p:spPr>
+          <a:xfrm>
+            <a:off x="489600" y="496800"/>
+            <a:ext cx="1260000" cy="133351"/>
+          </a:xfrm>
+          <a:prstGeom prst="rect">
+            <a:avLst/>
+          </a:prstGeom>
+          <a:noFill/>
+        </p:spPr>
+        <p:txBody>
+          <a:bodyPr wrap="square" lIns="0" rIns="0" tIns="0" bIns="0" anchor="t">
+            <a:spAutoFit/>
+          </a:bodyPr>
+          <a:lstStyle/>
+          <a:p>
+            <a:pPr algn="l">
+              <a:lnSpc>
+                <a:spcPts val="1015"/>
+              </a:lnSpc>
+            </a:pPr>
+            <a:r>
+              <a:rPr sz="700" b="0">
+                <a:solidFill>
+                  <a:srgbClr val="12151C"/>
+                </a:solidFill>
+                <a:latin typeface="맑은 고딕"/>
+                <a:ea typeface="맑은 고딕"/>
+              </a:rPr>
+              <a:t>로고 디자인</a:t>
+            </a:r>
+          </a:p>
+        </p:txBody>
+      </p:sp>
+      <p:cxnSp>
+        <p:nvCxnSpPr>
+          <p:cNvPr id="7" name="Connector 6"/>
+          <p:cNvCxnSpPr/>
+          <p:nvPr/>
+        </p:nvCxnSpPr>
+        <p:spPr>
+          <a:xfrm>
+            <a:off x="252000" y="640800"/>
+            <a:ext cx="1512000" cy="0"/>
+          </a:xfrm>
+          <a:prstGeom prst="line">
+            <a:avLst/>
+          </a:prstGeom>
+          <a:ln w="3600">
+            <a:solidFill>
+              <a:srgbClr val="DCDFE4"/>
+            </a:solidFill>
+          </a:ln>
+        </p:spPr>
+      </p:cxnSp>
+      <p:sp>
+        <p:nvSpPr>
+          <p:cNvPr id="8" name="텍스트"/>
+          <p:cNvSpPr txBox="1"/>
+          <p:nvPr/>
+        </p:nvSpPr>
+        <p:spPr>
+          <a:xfrm>
+            <a:off x="252000" y="694800"/>
+            <a:ext cx="216000" cy="95251"/>
+          </a:xfrm>
+          <a:prstGeom prst="rect">
+            <a:avLst/>
+          </a:prstGeom>
+          <a:noFill/>
+        </p:spPr>
+        <p:txBody>
+          <a:bodyPr wrap="square" lIns="0" rIns="0" tIns="0" bIns="0" anchor="t">
+            <a:spAutoFit/>
+          </a:bodyPr>
+          <a:lstStyle/>
+          <a:p>
+            <a:pPr algn="l">
+              <a:lnSpc>
+                <a:spcPts val="725"/>
+              </a:lnSpc>
+            </a:pPr>
+            <a:r>
+              <a:rPr sz="500" b="1" spc="100">
+                <a:solidFill>
+                  <a:srgbClr val="6B7280"/>
+                </a:solidFill>
+                <a:latin typeface="맑은 고딕"/>
+                <a:ea typeface="맑은 고딕"/>
+              </a:rPr>
+              <a:t>02</a:t>
+            </a:r>
+          </a:p>
+        </p:txBody>
+      </p:sp>
+      <p:sp>
+        <p:nvSpPr>
+          <p:cNvPr id="9" name="텍스트"/>
+          <p:cNvSpPr txBox="1"/>
+          <p:nvPr/>
+        </p:nvSpPr>
+        <p:spPr>
+          <a:xfrm>
+            <a:off x="489600" y="684000"/>
+            <a:ext cx="1260000" cy="133351"/>
+          </a:xfrm>
+          <a:prstGeom prst="rect">
+            <a:avLst/>
+          </a:prstGeom>
+          <a:noFill/>
+        </p:spPr>
+        <p:txBody>
+          <a:bodyPr wrap="square" lIns="0" rIns="0" tIns="0" bIns="0" anchor="t">
+            <a:spAutoFit/>
+          </a:bodyPr>
+          <a:lstStyle/>
+          <a:p>
+            <a:pPr algn="l">
+              <a:lnSpc>
+                <a:spcPts val="1015"/>
+              </a:lnSpc>
+            </a:pPr>
+            <a:r>
+              <a:rPr sz="700" b="0">
+                <a:solidFill>
+                  <a:srgbClr val="12151C"/>
+                </a:solidFill>
+                <a:latin typeface="맑은 고딕"/>
+                <a:ea typeface="맑은 고딕"/>
+              </a:rPr>
+              <a:t>편집 디자인</a:t>
+            </a:r>
+          </a:p>
+        </p:txBody>
+      </p:sp>
+      <p:cxnSp>
+        <p:nvCxnSpPr>
+          <p:cNvPr id="10" name="Connector 9"/>
+          <p:cNvCxnSpPr/>
+          <p:nvPr/>
+        </p:nvCxnSpPr>
+        <p:spPr>
+          <a:xfrm>
+            <a:off x="252000" y="828000"/>
+            <a:ext cx="1512000" cy="0"/>
+          </a:xfrm>
+          <a:prstGeom prst="line">
+            <a:avLst/>
+          </a:prstGeom>
+          <a:ln w="3600">
+            <a:solidFill>
+              <a:srgbClr val="DCDFE4"/>
+            </a:solidFill>
+          </a:ln>
+        </p:spPr>
+      </p:cxnSp>
+      <p:sp>
+        <p:nvSpPr>
+          <p:cNvPr id="11" name="텍스트"/>
+          <p:cNvSpPr txBox="1"/>
+          <p:nvPr/>
+        </p:nvSpPr>
+        <p:spPr>
+          <a:xfrm>
+            <a:off x="252000" y="882000"/>
+            <a:ext cx="216000" cy="95251"/>
+          </a:xfrm>
+          <a:prstGeom prst="rect">
+            <a:avLst/>
+          </a:prstGeom>
+          <a:noFill/>
+        </p:spPr>
+        <p:txBody>
+          <a:bodyPr wrap="square" lIns="0" rIns="0" tIns="0" bIns="0" anchor="t">
+            <a:spAutoFit/>
+          </a:bodyPr>
+          <a:lstStyle/>
+          <a:p>
+            <a:pPr algn="l">
+              <a:lnSpc>
+                <a:spcPts val="725"/>
+              </a:lnSpc>
+            </a:pPr>
+            <a:r>
+              <a:rPr sz="500" b="1" spc="100">
+                <a:solidFill>
+                  <a:srgbClr val="6B7280"/>
+                </a:solidFill>
+                <a:latin typeface="맑은 고딕"/>
+                <a:ea typeface="맑은 고딕"/>
+              </a:rPr>
+              <a:t>03</a:t>
+            </a:r>
+          </a:p>
+        </p:txBody>
+      </p:sp>
+      <p:sp>
+        <p:nvSpPr>
+          <p:cNvPr id="12" name="텍스트"/>
+          <p:cNvSpPr txBox="1"/>
+          <p:nvPr/>
+        </p:nvSpPr>
+        <p:spPr>
+          <a:xfrm>
+            <a:off x="489600" y="871200"/>
+            <a:ext cx="1260000" cy="133351"/>
+          </a:xfrm>
+          <a:prstGeom prst="rect">
+            <a:avLst/>
+          </a:prstGeom>
+          <a:noFill/>
+        </p:spPr>
+        <p:txBody>
+          <a:bodyPr wrap="square" lIns="0" rIns="0" tIns="0" bIns="0" anchor="t">
+            <a:spAutoFit/>
+          </a:bodyPr>
+          <a:lstStyle/>
+          <a:p>
+            <a:pPr algn="l">
+              <a:lnSpc>
+                <a:spcPts val="1015"/>
+              </a:lnSpc>
+            </a:pPr>
+            <a:r>
+              <a:rPr sz="700" b="0">
+                <a:solidFill>
+                  <a:srgbClr val="12151C"/>
+                </a:solidFill>
+                <a:latin typeface="맑은 고딕"/>
+                <a:ea typeface="맑은 고딕"/>
+              </a:rPr>
+              <a:t>캘리그라피</a:t>
+            </a:r>
+          </a:p>
+        </p:txBody>
+      </p:sp>
+      <p:cxnSp>
+        <p:nvCxnSpPr>
+          <p:cNvPr id="13" name="Connector 12"/>
+          <p:cNvCxnSpPr/>
+          <p:nvPr/>
+        </p:nvCxnSpPr>
+        <p:spPr>
+          <a:xfrm>
+            <a:off x="252000" y="1015200"/>
+            <a:ext cx="1512000" cy="0"/>
+          </a:xfrm>
+          <a:prstGeom prst="line">
+            <a:avLst/>
+          </a:prstGeom>
+          <a:ln w="3600">
+            <a:solidFill>
+              <a:srgbClr val="DCDFE4"/>
+            </a:solidFill>
+          </a:ln>
+        </p:spPr>
+      </p:cxnSp>
+      <p:sp>
+        <p:nvSpPr>
+          <p:cNvPr id="14" name="텍스트"/>
+          <p:cNvSpPr txBox="1"/>
+          <p:nvPr/>
+        </p:nvSpPr>
+        <p:spPr>
+          <a:xfrm>
+            <a:off x="252000" y="1069200"/>
+            <a:ext cx="216000" cy="95251"/>
+          </a:xfrm>
+          <a:prstGeom prst="rect">
+            <a:avLst/>
+          </a:prstGeom>
+          <a:noFill/>
+        </p:spPr>
+        <p:txBody>
+          <a:bodyPr wrap="square" lIns="0" rIns="0" tIns="0" bIns="0" anchor="t">
+            <a:spAutoFit/>
+          </a:bodyPr>
+          <a:lstStyle/>
+          <a:p>
+            <a:pPr algn="l">
+              <a:lnSpc>
+                <a:spcPts val="725"/>
+              </a:lnSpc>
+            </a:pPr>
+            <a:r>
+              <a:rPr sz="500" b="1" spc="100">
+                <a:solidFill>
+                  <a:srgbClr val="6B7280"/>
+                </a:solidFill>
+                <a:latin typeface="맑은 고딕"/>
+                <a:ea typeface="맑은 고딕"/>
+              </a:rPr>
+              <a:t>04</a:t>
+            </a:r>
+          </a:p>
+        </p:txBody>
+      </p:sp>
+      <p:sp>
+        <p:nvSpPr>
+          <p:cNvPr id="15" name="텍스트"/>
+          <p:cNvSpPr txBox="1"/>
+          <p:nvPr/>
+        </p:nvSpPr>
+        <p:spPr>
+          <a:xfrm>
+            <a:off x="489600" y="1058400"/>
+            <a:ext cx="1260000" cy="133351"/>
+          </a:xfrm>
+          <a:prstGeom prst="rect">
+            <a:avLst/>
+          </a:prstGeom>
+          <a:noFill/>
+        </p:spPr>
+        <p:txBody>
+          <a:bodyPr wrap="square" lIns="0" rIns="0" tIns="0" bIns="0" anchor="t">
+            <a:spAutoFit/>
+          </a:bodyPr>
+          <a:lstStyle/>
+          <a:p>
+            <a:pPr algn="l">
+              <a:lnSpc>
+                <a:spcPts val="1015"/>
+              </a:lnSpc>
+            </a:pPr>
+            <a:r>
+              <a:rPr sz="700" b="0">
+                <a:solidFill>
+                  <a:srgbClr val="12151C"/>
+                </a:solidFill>
+                <a:latin typeface="맑은 고딕"/>
+                <a:ea typeface="맑은 고딕"/>
+              </a:rPr>
+              <a:t>포트폴리오</a:t>
+            </a:r>
+          </a:p>
+        </p:txBody>
+      </p:sp>
+      <p:cxnSp>
+        <p:nvCxnSpPr>
+          <p:cNvPr id="16" name="Connector 15"/>
+          <p:cNvCxnSpPr/>
+          <p:nvPr/>
+        </p:nvCxnSpPr>
+        <p:spPr>
+          <a:xfrm>
+            <a:off x="252000" y="1202400"/>
+            <a:ext cx="1512000" cy="0"/>
+          </a:xfrm>
+          <a:prstGeom prst="line">
+            <a:avLst/>
+          </a:prstGeom>
+          <a:ln w="3600">
+            <a:solidFill>
+              <a:srgbClr val="DCDFE4"/>
+            </a:solidFill>
+          </a:ln>
+        </p:spPr>
+      </p:cxnSp>
+      <p:sp>
+        <p:nvSpPr>
+          <p:cNvPr id="17" name="Rectangle 16"/>
           <p:cNvSpPr/>
           <p:nvPr/>
         </p:nvSpPr>
         <p:spPr>
           <a:xfrm>
-            <a:off x="2412000" y="972000"/>
-            <a:ext cx="828000" cy="828000"/>
-          </a:xfrm>
-          <a:custGeom>
+            <a:off x="2088000" y="252000"/>
+            <a:ext cx="900000" cy="1296000"/>
+          </a:xfrm>
+          <a:prstGeom prst="rect">
             <a:avLst/>
-            <a:gdLst/>
-            <a:ahLst/>
-            <a:cxnLst/>
-            <a:rect l="l" t="t" r="r" b="b"/>
-            <a:pathLst>
-              <a:path w="828000" h="828000">
-                <a:moveTo>
-                  <a:pt x="828000" y="828000"/>
-                </a:moveTo>
-                <a:lnTo>
-                  <a:pt x="0" y="828000"/>
-                </a:lnTo>
-                <a:lnTo>
-                  <a:pt x="1773" y="773846"/>
-                </a:lnTo>
-                <a:lnTo>
-                  <a:pt x="7084" y="719924"/>
-                </a:lnTo>
-                <a:lnTo>
-                  <a:pt x="15910" y="666465"/>
-                </a:lnTo>
-                <a:lnTo>
-                  <a:pt x="28213" y="613698"/>
-                </a:lnTo>
-                <a:lnTo>
-                  <a:pt x="43942" y="561848"/>
-                </a:lnTo>
-                <a:lnTo>
-                  <a:pt x="63028" y="511138"/>
-                </a:lnTo>
-                <a:lnTo>
-                  <a:pt x="85389" y="461785"/>
-                </a:lnTo>
-                <a:lnTo>
-                  <a:pt x="110931" y="414000"/>
-                </a:lnTo>
-                <a:lnTo>
-                  <a:pt x="139543" y="367988"/>
-                </a:lnTo>
-                <a:lnTo>
-                  <a:pt x="171103" y="323946"/>
-                </a:lnTo>
-                <a:lnTo>
-                  <a:pt x="205477" y="282062"/>
-                </a:lnTo>
-                <a:lnTo>
-                  <a:pt x="242516" y="242516"/>
-                </a:lnTo>
-                <a:lnTo>
-                  <a:pt x="282062" y="205477"/>
-                </a:lnTo>
-                <a:lnTo>
-                  <a:pt x="323946" y="171103"/>
-                </a:lnTo>
-                <a:lnTo>
-                  <a:pt x="367988" y="139543"/>
-                </a:lnTo>
-                <a:lnTo>
-                  <a:pt x="414000" y="110931"/>
-                </a:lnTo>
-                <a:lnTo>
-                  <a:pt x="461785" y="85389"/>
-                </a:lnTo>
-                <a:lnTo>
-                  <a:pt x="511138" y="63028"/>
-                </a:lnTo>
-                <a:lnTo>
-                  <a:pt x="561848" y="43942"/>
-                </a:lnTo>
-                <a:lnTo>
-                  <a:pt x="613698" y="28213"/>
-                </a:lnTo>
-                <a:lnTo>
-                  <a:pt x="666465" y="15910"/>
-                </a:lnTo>
-                <a:lnTo>
-                  <a:pt x="719924" y="7084"/>
-                </a:lnTo>
-                <a:lnTo>
-                  <a:pt x="773846" y="1773"/>
-                </a:lnTo>
-                <a:lnTo>
-                  <a:pt x="828000" y="0"/>
-                </a:lnTo>
-                <a:close/>
-              </a:path>
-            </a:pathLst>
-          </a:custGeom>
+          </a:prstGeom>
           <a:solidFill>
-            <a:srgbClr val="C54668"/>
+            <a:srgbClr val="B5123E"/>
           </a:solidFill>
           <a:ln>
             <a:noFill/>
@@ -3719,14 +4148,14 @@
       </p:sp>
       <p:sp>
         <p:nvSpPr>
-          <p:cNvPr id="4" name="텍스트"/>
+          <p:cNvPr id="18" name="텍스트"/>
           <p:cNvSpPr txBox="1"/>
           <p:nvPr/>
         </p:nvSpPr>
         <p:spPr>
           <a:xfrm>
-            <a:off x="252000" y="432000"/>
-            <a:ext cx="2304000" cy="720000"/>
+            <a:off x="2196000" y="360000"/>
+            <a:ext cx="684000" cy="95251"/>
           </a:xfrm>
           <a:prstGeom prst="rect">
             <a:avLst/>
@@ -3741,32 +4170,95 @@
           <a:p>
             <a:pPr algn="l">
               <a:lnSpc>
-                <a:spcPts val="1884"/>
+                <a:spcPts val="725"/>
               </a:lnSpc>
             </a:pPr>
             <a:r>
-              <a:rPr sz="1300" b="1">
+              <a:rPr sz="500" b="1" spc="240">
+                <a:solidFill>
+                  <a:srgbClr val="FFFFFF">
+                    <a:alpha val="75000"/>
+                  </a:srgbClr>
+                </a:solidFill>
+                <a:latin typeface="맑은 고딕"/>
+                <a:ea typeface="맑은 고딕"/>
+              </a:rPr>
+              <a:t>INFO</a:t>
+            </a:r>
+          </a:p>
+        </p:txBody>
+      </p:sp>
+      <p:sp>
+        <p:nvSpPr>
+          <p:cNvPr id="19" name="텍스트"/>
+          <p:cNvSpPr txBox="1"/>
+          <p:nvPr/>
+        </p:nvSpPr>
+        <p:spPr>
+          <a:xfrm>
+            <a:off x="2196000" y="504000"/>
+            <a:ext cx="684000" cy="121921"/>
+          </a:xfrm>
+          <a:prstGeom prst="rect">
+            <a:avLst/>
+          </a:prstGeom>
+          <a:noFill/>
+        </p:spPr>
+        <p:txBody>
+          <a:bodyPr wrap="square" lIns="0" rIns="0" tIns="0" bIns="0" anchor="t">
+            <a:spAutoFit/>
+          </a:bodyPr>
+          <a:lstStyle/>
+          <a:p>
+            <a:pPr algn="l">
+              <a:lnSpc>
+                <a:spcPts val="927"/>
+              </a:lnSpc>
+            </a:pPr>
+            <a:r>
+              <a:rPr sz="640" b="1">
                 <a:solidFill>
                   <a:srgbClr val="FFFFFF"/>
                 </a:solidFill>
                 <a:latin typeface="맑은 고딕"/>
                 <a:ea typeface="맑은 고딕"/>
               </a:rPr>
-              <a:t>영상이 되어 오래 기억되도록</a:t>
-            </a:r>
-          </a:p>
-        </p:txBody>
-      </p:sp>
-      <p:sp>
-        <p:nvSpPr>
-          <p:cNvPr id="5" name="텍스트"/>
+              <a:t>평일 10:00 – 19:00</a:t>
+            </a:r>
+          </a:p>
+        </p:txBody>
+      </p:sp>
+      <p:cxnSp>
+        <p:nvCxnSpPr>
+          <p:cNvPr id="20" name="Connector 19"/>
+          <p:cNvCxnSpPr/>
+          <p:nvPr/>
+        </p:nvCxnSpPr>
+        <p:spPr>
+          <a:xfrm>
+            <a:off x="2196000" y="770400"/>
+            <a:ext cx="684000" cy="0"/>
+          </a:xfrm>
+          <a:prstGeom prst="line">
+            <a:avLst/>
+          </a:prstGeom>
+          <a:ln w="3600">
+            <a:solidFill>
+              <a:srgbClr val="FFFFFF"/>
+            </a:solidFill>
+          </a:ln>
+        </p:spPr>
+      </p:cxnSp>
+      <p:sp>
+        <p:nvSpPr>
+          <p:cNvPr id="21" name="텍스트"/>
           <p:cNvSpPr txBox="1"/>
           <p:nvPr/>
         </p:nvSpPr>
         <p:spPr>
           <a:xfrm>
-            <a:off x="252000" y="1476000"/>
-            <a:ext cx="1800000" cy="133351"/>
+            <a:off x="2196000" y="849600"/>
+            <a:ext cx="684000" cy="91441"/>
           </a:xfrm>
           <a:prstGeom prst="rect">
             <a:avLst/>
@@ -3781,11 +4273,93 @@
           <a:p>
             <a:pPr algn="l">
               <a:lnSpc>
-                <a:spcPts val="1015"/>
+                <a:spcPts val="696"/>
               </a:lnSpc>
             </a:pPr>
             <a:r>
-              <a:rPr sz="700" b="1" spc="200">
+              <a:rPr sz="480" b="1" spc="140">
+                <a:solidFill>
+                  <a:srgbClr val="FFFFFF">
+                    <a:alpha val="75000"/>
+                  </a:srgbClr>
+                </a:solidFill>
+                <a:latin typeface="맑은 고딕"/>
+                <a:ea typeface="맑은 고딕"/>
+              </a:rPr>
+              <a:t>INSTAGRAM</a:t>
+            </a:r>
+          </a:p>
+        </p:txBody>
+      </p:sp>
+      <p:sp>
+        <p:nvSpPr>
+          <p:cNvPr id="22" name="텍스트"/>
+          <p:cNvSpPr txBox="1"/>
+          <p:nvPr/>
+        </p:nvSpPr>
+        <p:spPr>
+          <a:xfrm>
+            <a:off x="2196000" y="957600"/>
+            <a:ext cx="684000" cy="121921"/>
+          </a:xfrm>
+          <a:prstGeom prst="rect">
+            <a:avLst/>
+          </a:prstGeom>
+          <a:noFill/>
+        </p:spPr>
+        <p:txBody>
+          <a:bodyPr wrap="square" lIns="0" rIns="0" tIns="0" bIns="0" anchor="t">
+            <a:spAutoFit/>
+          </a:bodyPr>
+          <a:lstStyle/>
+          <a:p>
+            <a:pPr algn="l">
+              <a:lnSpc>
+                <a:spcPts val="927"/>
+              </a:lnSpc>
+            </a:pPr>
+            <a:r>
+              <a:rPr sz="640" b="1">
+                <a:solidFill>
+                  <a:srgbClr val="FFFFFF"/>
+                </a:solidFill>
+                <a:latin typeface="맑은 고딕"/>
+                <a:ea typeface="맑은 고딕"/>
+              </a:rPr>
+              <a:t>@아이디</a:t>
+            </a:r>
+          </a:p>
+        </p:txBody>
+      </p:sp>
+      <p:sp>
+        <p:nvSpPr>
+          <p:cNvPr id="23" name="텍스트"/>
+          <p:cNvSpPr txBox="1"/>
+          <p:nvPr/>
+        </p:nvSpPr>
+        <p:spPr>
+          <a:xfrm>
+            <a:off x="2196000" y="1368000"/>
+            <a:ext cx="720000" cy="106681"/>
+          </a:xfrm>
+          <a:prstGeom prst="rect">
+            <a:avLst/>
+          </a:prstGeom>
+          <a:noFill/>
+        </p:spPr>
+        <p:txBody>
+          <a:bodyPr wrap="square" lIns="0" rIns="0" tIns="0" bIns="0" anchor="t">
+            <a:spAutoFit/>
+          </a:bodyPr>
+          <a:lstStyle/>
+          <a:p>
+            <a:pPr algn="l">
+              <a:lnSpc>
+                <a:spcPts val="811"/>
+              </a:lnSpc>
+            </a:pPr>
+            <a:r>
+              <a:rPr sz="560" b="1" spc="80">
                 <a:solidFill>
                   <a:srgbClr val="FFFFFF"/>
                 </a:solidFill>
